--- a/docs/EduHub_Presentation_Full_Pro.pptx
+++ b/docs/EduHub_Presentation_Full_Pro.pptx
@@ -3265,6 +3265,10 @@
             <a:prstDash val="solid"/>
           </a:ln>
         </p:spPr>
+        <p:txBody>
+          <a:bodyPr/>
+          <a:p/>
+        </p:txBody>
       </p:sp>
       <p:sp>
         <p:nvSpPr>
@@ -3696,6 +3700,10 @@
             </a:outerShdw>
           </a:effectLst>
         </p:spPr>
+        <p:txBody>
+          <a:bodyPr/>
+          <a:p/>
+        </p:txBody>
       </p:sp>
       <p:sp>
         <p:nvSpPr>
@@ -3718,6 +3726,10 @@
           </a:solidFill>
           <a:ln/>
         </p:spPr>
+        <p:txBody>
+          <a:bodyPr/>
+          <a:p/>
+        </p:txBody>
       </p:sp>
       <p:sp>
         <p:nvSpPr>
@@ -3738,6 +3750,10 @@
           </a:solidFill>
           <a:ln/>
         </p:spPr>
+        <p:txBody>
+          <a:bodyPr/>
+          <a:p/>
+        </p:txBody>
       </p:sp>
       <p:sp>
         <p:nvSpPr>
@@ -3758,6 +3774,10 @@
           </a:solidFill>
           <a:ln/>
         </p:spPr>
+        <p:txBody>
+          <a:bodyPr/>
+          <a:p/>
+        </p:txBody>
       </p:sp>
       <p:pic>
         <p:nvPicPr>
@@ -4089,7 +4109,7 @@
                 <a:ea typeface="Calibri" pitchFamily="34" charset="-122"/>
                 <a:cs typeface="Calibri" pitchFamily="34" charset="-120"/>
               </a:rPr>
-              <a:t>9 метрик и отзывы</a:t>
+              <a:t>8 метрик и отзывы</a:t>
             </a:r>
             <a:endParaRPr lang="en-US" sz="1200" dirty="0"/>
           </a:p>
@@ -4194,6 +4214,10 @@
           </a:solidFill>
           <a:ln/>
         </p:spPr>
+        <p:txBody>
+          <a:bodyPr/>
+          <a:p/>
+        </p:txBody>
       </p:sp>
       <p:sp>
         <p:nvSpPr>
@@ -4267,6 +4291,10 @@
             </a:outerShdw>
           </a:effectLst>
         </p:spPr>
+        <p:txBody>
+          <a:bodyPr/>
+          <a:p/>
+        </p:txBody>
       </p:sp>
       <p:sp>
         <p:nvSpPr>
@@ -4289,6 +4317,10 @@
           </a:solidFill>
           <a:ln/>
         </p:spPr>
+        <p:txBody>
+          <a:bodyPr/>
+          <a:p/>
+        </p:txBody>
       </p:sp>
       <p:sp>
         <p:nvSpPr>
@@ -4309,6 +4341,10 @@
           </a:solidFill>
           <a:ln/>
         </p:spPr>
+        <p:txBody>
+          <a:bodyPr/>
+          <a:p/>
+        </p:txBody>
       </p:sp>
       <p:sp>
         <p:nvSpPr>
@@ -4329,6 +4365,10 @@
           </a:solidFill>
           <a:ln/>
         </p:spPr>
+        <p:txBody>
+          <a:bodyPr/>
+          <a:p/>
+        </p:txBody>
       </p:sp>
       <p:pic>
         <p:nvPicPr>
@@ -4765,6 +4805,10 @@
           </a:solidFill>
           <a:ln/>
         </p:spPr>
+        <p:txBody>
+          <a:bodyPr/>
+          <a:p/>
+        </p:txBody>
       </p:sp>
       <p:sp>
         <p:nvSpPr>
@@ -4838,6 +4882,10 @@
             </a:outerShdw>
           </a:effectLst>
         </p:spPr>
+        <p:txBody>
+          <a:bodyPr/>
+          <a:p/>
+        </p:txBody>
       </p:sp>
       <p:sp>
         <p:nvSpPr>
@@ -4860,6 +4908,10 @@
           </a:solidFill>
           <a:ln/>
         </p:spPr>
+        <p:txBody>
+          <a:bodyPr/>
+          <a:p/>
+        </p:txBody>
       </p:sp>
       <p:sp>
         <p:nvSpPr>
@@ -4880,6 +4932,10 @@
           </a:solidFill>
           <a:ln/>
         </p:spPr>
+        <p:txBody>
+          <a:bodyPr/>
+          <a:p/>
+        </p:txBody>
       </p:sp>
       <p:sp>
         <p:nvSpPr>
@@ -4900,6 +4956,10 @@
           </a:solidFill>
           <a:ln/>
         </p:spPr>
+        <p:txBody>
+          <a:bodyPr/>
+          <a:p/>
+        </p:txBody>
       </p:sp>
       <p:pic>
         <p:nvPicPr>
@@ -5336,6 +5396,10 @@
           </a:solidFill>
           <a:ln/>
         </p:spPr>
+        <p:txBody>
+          <a:bodyPr/>
+          <a:p/>
+        </p:txBody>
       </p:sp>
       <p:sp>
         <p:nvSpPr>
@@ -5590,6 +5654,10 @@
             <a:prstDash val="solid"/>
           </a:ln>
         </p:spPr>
+        <p:txBody>
+          <a:bodyPr/>
+          <a:p/>
+        </p:txBody>
       </p:sp>
       <p:sp>
         <p:nvSpPr>
@@ -5610,6 +5678,10 @@
           </a:solidFill>
           <a:ln/>
         </p:spPr>
+        <p:txBody>
+          <a:bodyPr/>
+          <a:p/>
+        </p:txBody>
       </p:sp>
       <p:pic>
         <p:nvPicPr>
@@ -5742,6 +5814,10 @@
             <a:prstDash val="solid"/>
           </a:ln>
         </p:spPr>
+        <p:txBody>
+          <a:bodyPr/>
+          <a:p/>
+        </p:txBody>
       </p:sp>
       <p:sp>
         <p:nvSpPr>
@@ -5762,6 +5838,10 @@
           </a:solidFill>
           <a:ln/>
         </p:spPr>
+        <p:txBody>
+          <a:bodyPr/>
+          <a:p/>
+        </p:txBody>
       </p:sp>
       <p:pic>
         <p:nvPicPr>
@@ -5894,6 +5974,10 @@
             <a:prstDash val="solid"/>
           </a:ln>
         </p:spPr>
+        <p:txBody>
+          <a:bodyPr/>
+          <a:p/>
+        </p:txBody>
       </p:sp>
       <p:sp>
         <p:nvSpPr>
@@ -5914,6 +5998,10 @@
           </a:solidFill>
           <a:ln/>
         </p:spPr>
+        <p:txBody>
+          <a:bodyPr/>
+          <a:p/>
+        </p:txBody>
       </p:sp>
       <p:pic>
         <p:nvPicPr>
@@ -6046,6 +6134,10 @@
             <a:prstDash val="solid"/>
           </a:ln>
         </p:spPr>
+        <p:txBody>
+          <a:bodyPr/>
+          <a:p/>
+        </p:txBody>
       </p:sp>
       <p:sp>
         <p:nvSpPr>
@@ -6066,6 +6158,10 @@
           </a:solidFill>
           <a:ln/>
         </p:spPr>
+        <p:txBody>
+          <a:bodyPr/>
+          <a:p/>
+        </p:txBody>
       </p:sp>
       <p:pic>
         <p:nvPicPr>
@@ -6198,6 +6294,10 @@
             <a:prstDash val="solid"/>
           </a:ln>
         </p:spPr>
+        <p:txBody>
+          <a:bodyPr/>
+          <a:p/>
+        </p:txBody>
       </p:sp>
       <p:sp>
         <p:nvSpPr>
@@ -6218,6 +6318,10 @@
           </a:solidFill>
           <a:ln/>
         </p:spPr>
+        <p:txBody>
+          <a:bodyPr/>
+          <a:p/>
+        </p:txBody>
       </p:sp>
       <p:pic>
         <p:nvPicPr>
@@ -6350,6 +6454,10 @@
             <a:prstDash val="solid"/>
           </a:ln>
         </p:spPr>
+        <p:txBody>
+          <a:bodyPr/>
+          <a:p/>
+        </p:txBody>
       </p:sp>
       <p:sp>
         <p:nvSpPr>
@@ -6370,6 +6478,10 @@
           </a:solidFill>
           <a:ln/>
         </p:spPr>
+        <p:txBody>
+          <a:bodyPr/>
+          <a:p/>
+        </p:txBody>
       </p:sp>
       <p:pic>
         <p:nvPicPr>
@@ -6690,6 +6802,10 @@
             <a:prstDash val="solid"/>
           </a:ln>
         </p:spPr>
+        <p:txBody>
+          <a:bodyPr/>
+          <a:p/>
+        </p:txBody>
       </p:sp>
       <p:sp>
         <p:nvSpPr>
@@ -6710,6 +6826,10 @@
           </a:solidFill>
           <a:ln/>
         </p:spPr>
+        <p:txBody>
+          <a:bodyPr/>
+          <a:p/>
+        </p:txBody>
       </p:sp>
       <p:pic>
         <p:nvPicPr>
@@ -6842,6 +6962,10 @@
             <a:prstDash val="solid"/>
           </a:ln>
         </p:spPr>
+        <p:txBody>
+          <a:bodyPr/>
+          <a:p/>
+        </p:txBody>
       </p:sp>
       <p:sp>
         <p:nvSpPr>
@@ -6862,6 +6986,10 @@
           </a:solidFill>
           <a:ln/>
         </p:spPr>
+        <p:txBody>
+          <a:bodyPr/>
+          <a:p/>
+        </p:txBody>
       </p:sp>
       <p:pic>
         <p:nvPicPr>
@@ -6994,6 +7122,10 @@
             <a:prstDash val="solid"/>
           </a:ln>
         </p:spPr>
+        <p:txBody>
+          <a:bodyPr/>
+          <a:p/>
+        </p:txBody>
       </p:sp>
       <p:sp>
         <p:nvSpPr>
@@ -7014,6 +7146,10 @@
           </a:solidFill>
           <a:ln/>
         </p:spPr>
+        <p:txBody>
+          <a:bodyPr/>
+          <a:p/>
+        </p:txBody>
       </p:sp>
       <p:pic>
         <p:nvPicPr>
@@ -7146,6 +7282,10 @@
             <a:prstDash val="solid"/>
           </a:ln>
         </p:spPr>
+        <p:txBody>
+          <a:bodyPr/>
+          <a:p/>
+        </p:txBody>
       </p:sp>
       <p:sp>
         <p:nvSpPr>
@@ -7166,6 +7306,10 @@
           </a:solidFill>
           <a:ln/>
         </p:spPr>
+        <p:txBody>
+          <a:bodyPr/>
+          <a:p/>
+        </p:txBody>
       </p:sp>
       <p:pic>
         <p:nvPicPr>
@@ -7298,6 +7442,10 @@
             <a:prstDash val="solid"/>
           </a:ln>
         </p:spPr>
+        <p:txBody>
+          <a:bodyPr/>
+          <a:p/>
+        </p:txBody>
       </p:sp>
       <p:sp>
         <p:nvSpPr>
@@ -7318,6 +7466,10 @@
           </a:solidFill>
           <a:ln/>
         </p:spPr>
+        <p:txBody>
+          <a:bodyPr/>
+          <a:p/>
+        </p:txBody>
       </p:sp>
       <p:pic>
         <p:nvPicPr>
@@ -7450,6 +7602,10 @@
             <a:prstDash val="solid"/>
           </a:ln>
         </p:spPr>
+        <p:txBody>
+          <a:bodyPr/>
+          <a:p/>
+        </p:txBody>
       </p:sp>
       <p:sp>
         <p:nvSpPr>
@@ -7470,6 +7626,10 @@
           </a:solidFill>
           <a:ln/>
         </p:spPr>
+        <p:txBody>
+          <a:bodyPr/>
+          <a:p/>
+        </p:txBody>
       </p:sp>
       <p:pic>
         <p:nvPicPr>
@@ -7758,7 +7918,7 @@
                 <a:ea typeface="Cambria" pitchFamily="34" charset="-122"/>
                 <a:cs typeface="Cambria" pitchFamily="34" charset="-120"/>
               </a:rPr>
-              <a:t>Система рейтинга: 9 метрик</a:t>
+              <a:t>Система рейтинга: 8 метрик</a:t>
             </a:r>
             <a:endParaRPr lang="en-US" sz="2900" dirty="0"/>
           </a:p>
@@ -7797,7 +7957,7 @@
                 <a:ea typeface="Calibri" pitchFamily="34" charset="-122"/>
                 <a:cs typeface="Calibri" pitchFamily="34" charset="-120"/>
               </a:rPr>
-              <a:t>Вместо одной общей оценки — 9 независимых метрик (1–5★). Родитель видит сильные и слабые стороны.</a:t>
+              <a:t>Вместо одной общей оценки — 8 независимых метрик (1–5★). Родитель видит сильные и слабые стороны.</a:t>
             </a:r>
             <a:endParaRPr lang="en-US" sz="1400" dirty="0"/>
           </a:p>
@@ -7829,6 +7989,10 @@
             <a:prstDash val="solid"/>
           </a:ln>
         </p:spPr>
+        <p:txBody>
+          <a:bodyPr/>
+          <a:p/>
+        </p:txBody>
       </p:sp>
       <p:sp>
         <p:nvSpPr>
@@ -7849,6 +8013,10 @@
           </a:solidFill>
           <a:ln/>
         </p:spPr>
+        <p:txBody>
+          <a:bodyPr/>
+          <a:p/>
+        </p:txBody>
       </p:sp>
       <p:pic>
         <p:nvPicPr>
@@ -7978,6 +8146,10 @@
             <a:prstDash val="solid"/>
           </a:ln>
         </p:spPr>
+        <p:txBody>
+          <a:bodyPr/>
+          <a:p/>
+        </p:txBody>
       </p:sp>
       <p:sp>
         <p:nvSpPr>
@@ -7998,6 +8170,10 @@
           </a:solidFill>
           <a:ln/>
         </p:spPr>
+        <p:txBody>
+          <a:bodyPr/>
+          <a:p/>
+        </p:txBody>
       </p:sp>
       <p:pic>
         <p:nvPicPr>
@@ -8127,6 +8303,10 @@
             <a:prstDash val="solid"/>
           </a:ln>
         </p:spPr>
+        <p:txBody>
+          <a:bodyPr/>
+          <a:p/>
+        </p:txBody>
       </p:sp>
       <p:sp>
         <p:nvSpPr>
@@ -8147,6 +8327,10 @@
           </a:solidFill>
           <a:ln/>
         </p:spPr>
+        <p:txBody>
+          <a:bodyPr/>
+          <a:p/>
+        </p:txBody>
       </p:sp>
       <p:pic>
         <p:nvPicPr>
@@ -8276,6 +8460,10 @@
             <a:prstDash val="solid"/>
           </a:ln>
         </p:spPr>
+        <p:txBody>
+          <a:bodyPr/>
+          <a:p/>
+        </p:txBody>
       </p:sp>
       <p:sp>
         <p:nvSpPr>
@@ -8296,6 +8484,10 @@
           </a:solidFill>
           <a:ln/>
         </p:spPr>
+        <p:txBody>
+          <a:bodyPr/>
+          <a:p/>
+        </p:txBody>
       </p:sp>
       <p:pic>
         <p:nvPicPr>
@@ -8425,6 +8617,10 @@
             <a:prstDash val="solid"/>
           </a:ln>
         </p:spPr>
+        <p:txBody>
+          <a:bodyPr/>
+          <a:p/>
+        </p:txBody>
       </p:sp>
       <p:sp>
         <p:nvSpPr>
@@ -8445,6 +8641,10 @@
           </a:solidFill>
           <a:ln/>
         </p:spPr>
+        <p:txBody>
+          <a:bodyPr/>
+          <a:p/>
+        </p:txBody>
       </p:sp>
       <p:pic>
         <p:nvPicPr>
@@ -8574,6 +8774,10 @@
             <a:prstDash val="solid"/>
           </a:ln>
         </p:spPr>
+        <p:txBody>
+          <a:bodyPr/>
+          <a:p/>
+        </p:txBody>
       </p:sp>
       <p:sp>
         <p:nvSpPr>
@@ -8594,6 +8798,10 @@
           </a:solidFill>
           <a:ln/>
         </p:spPr>
+        <p:txBody>
+          <a:bodyPr/>
+          <a:p/>
+        </p:txBody>
       </p:sp>
       <p:pic>
         <p:nvPicPr>
@@ -8723,6 +8931,10 @@
             <a:prstDash val="solid"/>
           </a:ln>
         </p:spPr>
+        <p:txBody>
+          <a:bodyPr/>
+          <a:p/>
+        </p:txBody>
       </p:sp>
       <p:sp>
         <p:nvSpPr>
@@ -8743,6 +8955,10 @@
           </a:solidFill>
           <a:ln/>
         </p:spPr>
+        <p:txBody>
+          <a:bodyPr/>
+          <a:p/>
+        </p:txBody>
       </p:sp>
       <p:pic>
         <p:nvPicPr>
@@ -8872,6 +9088,10 @@
             <a:prstDash val="solid"/>
           </a:ln>
         </p:spPr>
+        <p:txBody>
+          <a:bodyPr/>
+          <a:p/>
+        </p:txBody>
       </p:sp>
       <p:sp>
         <p:nvSpPr>
@@ -8892,6 +9112,10 @@
           </a:solidFill>
           <a:ln/>
         </p:spPr>
+        <p:txBody>
+          <a:bodyPr/>
+          <a:p/>
+        </p:txBody>
       </p:sp>
       <p:pic>
         <p:nvPicPr>
@@ -9021,6 +9245,10 @@
             <a:prstDash val="solid"/>
           </a:ln>
         </p:spPr>
+        <p:txBody>
+          <a:bodyPr/>
+          <a:p/>
+        </p:txBody>
       </p:sp>
       <p:sp>
         <p:nvSpPr>
@@ -9041,6 +9269,10 @@
           </a:solidFill>
           <a:ln/>
         </p:spPr>
+        <p:txBody>
+          <a:bodyPr/>
+          <a:p/>
+        </p:txBody>
       </p:sp>
       <p:pic>
         <p:nvPicPr>
@@ -9099,7 +9331,7 @@
                 <a:ea typeface="Cambria" pitchFamily="34" charset="-122"/>
                 <a:cs typeface="Cambria" pitchFamily="34" charset="-120"/>
               </a:rPr>
-              <a:t>9</a:t>
+              <a:t>Ø</a:t>
             </a:r>
             <a:endParaRPr lang="en-US" sz="3000" dirty="0"/>
           </a:p>
@@ -9365,6 +9597,10 @@
             </a:outerShdw>
           </a:effectLst>
         </p:spPr>
+        <p:txBody>
+          <a:bodyPr/>
+          <a:p/>
+        </p:txBody>
       </p:sp>
       <p:sp>
         <p:nvSpPr>
@@ -9385,6 +9621,10 @@
           </a:solidFill>
           <a:ln/>
         </p:spPr>
+        <p:txBody>
+          <a:bodyPr/>
+          <a:p/>
+        </p:txBody>
       </p:sp>
       <p:pic>
         <p:nvPicPr>
@@ -9524,6 +9764,10 @@
             </a:outerShdw>
           </a:effectLst>
         </p:spPr>
+        <p:txBody>
+          <a:bodyPr/>
+          <a:p/>
+        </p:txBody>
       </p:sp>
       <p:sp>
         <p:nvSpPr>
@@ -9544,6 +9788,10 @@
           </a:solidFill>
           <a:ln/>
         </p:spPr>
+        <p:txBody>
+          <a:bodyPr/>
+          <a:p/>
+        </p:txBody>
       </p:sp>
       <p:pic>
         <p:nvPicPr>
@@ -9602,7 +9850,7 @@
                 <a:ea typeface="Calibri" pitchFamily="34" charset="-122"/>
                 <a:cs typeface="Calibri" pitchFamily="34" charset="-120"/>
               </a:rPr>
-              <a:t>9 метрик рейтинга</a:t>
+              <a:t>8 метрик рейтинга</a:t>
             </a:r>
             <a:endParaRPr lang="en-US" sz="1700" dirty="0"/>
           </a:p>
@@ -9683,6 +9931,10 @@
             </a:outerShdw>
           </a:effectLst>
         </p:spPr>
+        <p:txBody>
+          <a:bodyPr/>
+          <a:p/>
+        </p:txBody>
       </p:sp>
       <p:sp>
         <p:nvSpPr>
@@ -9703,6 +9955,10 @@
           </a:solidFill>
           <a:ln/>
         </p:spPr>
+        <p:txBody>
+          <a:bodyPr/>
+          <a:p/>
+        </p:txBody>
       </p:sp>
       <p:pic>
         <p:nvPicPr>
@@ -9842,6 +10098,10 @@
             </a:outerShdw>
           </a:effectLst>
         </p:spPr>
+        <p:txBody>
+          <a:bodyPr/>
+          <a:p/>
+        </p:txBody>
       </p:sp>
       <p:sp>
         <p:nvSpPr>
@@ -9862,6 +10122,10 @@
           </a:solidFill>
           <a:ln/>
         </p:spPr>
+        <p:txBody>
+          <a:bodyPr/>
+          <a:p/>
+        </p:txBody>
       </p:sp>
       <p:pic>
         <p:nvPicPr>
@@ -10260,6 +10524,10 @@
             <a:prstDash val="solid"/>
           </a:ln>
         </p:spPr>
+        <p:txBody>
+          <a:bodyPr/>
+          <a:p/>
+        </p:txBody>
       </p:sp>
       <p:sp>
         <p:nvSpPr>
@@ -10319,6 +10587,10 @@
           </a:solidFill>
           <a:ln/>
         </p:spPr>
+        <p:txBody>
+          <a:bodyPr/>
+          <a:p/>
+        </p:txBody>
       </p:sp>
       <p:sp>
         <p:nvSpPr>
@@ -10380,6 +10652,10 @@
           </a:solidFill>
           <a:ln/>
         </p:spPr>
+        <p:txBody>
+          <a:bodyPr/>
+          <a:p/>
+        </p:txBody>
       </p:sp>
       <p:sp>
         <p:nvSpPr>
@@ -10446,6 +10722,10 @@
             <a:prstDash val="solid"/>
           </a:ln>
         </p:spPr>
+        <p:txBody>
+          <a:bodyPr/>
+          <a:p/>
+        </p:txBody>
       </p:sp>
       <p:sp>
         <p:nvSpPr>
@@ -10505,6 +10785,10 @@
           </a:solidFill>
           <a:ln/>
         </p:spPr>
+        <p:txBody>
+          <a:bodyPr/>
+          <a:p/>
+        </p:txBody>
       </p:sp>
       <p:sp>
         <p:nvSpPr>
@@ -10566,6 +10850,10 @@
           </a:solidFill>
           <a:ln/>
         </p:spPr>
+        <p:txBody>
+          <a:bodyPr/>
+          <a:p/>
+        </p:txBody>
       </p:sp>
       <p:sp>
         <p:nvSpPr>
@@ -10632,6 +10920,10 @@
             <a:prstDash val="solid"/>
           </a:ln>
         </p:spPr>
+        <p:txBody>
+          <a:bodyPr/>
+          <a:p/>
+        </p:txBody>
       </p:sp>
       <p:sp>
         <p:nvSpPr>
@@ -10691,6 +10983,10 @@
           </a:solidFill>
           <a:ln/>
         </p:spPr>
+        <p:txBody>
+          <a:bodyPr/>
+          <a:p/>
+        </p:txBody>
       </p:sp>
       <p:sp>
         <p:nvSpPr>
@@ -10752,6 +11048,10 @@
           </a:solidFill>
           <a:ln/>
         </p:spPr>
+        <p:txBody>
+          <a:bodyPr/>
+          <a:p/>
+        </p:txBody>
       </p:sp>
       <p:sp>
         <p:nvSpPr>
@@ -10818,6 +11118,10 @@
             <a:prstDash val="solid"/>
           </a:ln>
         </p:spPr>
+        <p:txBody>
+          <a:bodyPr/>
+          <a:p/>
+        </p:txBody>
       </p:sp>
       <p:sp>
         <p:nvSpPr>
@@ -10877,6 +11181,10 @@
           </a:solidFill>
           <a:ln/>
         </p:spPr>
+        <p:txBody>
+          <a:bodyPr/>
+          <a:p/>
+        </p:txBody>
       </p:sp>
       <p:sp>
         <p:nvSpPr>
@@ -10938,6 +11246,10 @@
           </a:solidFill>
           <a:ln/>
         </p:spPr>
+        <p:txBody>
+          <a:bodyPr/>
+          <a:p/>
+        </p:txBody>
       </p:sp>
       <p:sp>
         <p:nvSpPr>
@@ -11199,6 +11511,10 @@
             </a:outerShdw>
           </a:effectLst>
         </p:spPr>
+        <p:txBody>
+          <a:bodyPr/>
+          <a:p/>
+        </p:txBody>
       </p:sp>
       <p:sp>
         <p:nvSpPr>
@@ -11219,6 +11535,10 @@
           </a:solidFill>
           <a:ln/>
         </p:spPr>
+        <p:txBody>
+          <a:bodyPr/>
+          <a:p/>
+        </p:txBody>
       </p:sp>
       <p:pic>
         <p:nvPicPr>
@@ -11355,6 +11675,10 @@
             </a:outerShdw>
           </a:effectLst>
         </p:spPr>
+        <p:txBody>
+          <a:bodyPr/>
+          <a:p/>
+        </p:txBody>
       </p:sp>
       <p:sp>
         <p:nvSpPr>
@@ -11375,6 +11699,10 @@
           </a:solidFill>
           <a:ln/>
         </p:spPr>
+        <p:txBody>
+          <a:bodyPr/>
+          <a:p/>
+        </p:txBody>
       </p:sp>
       <p:pic>
         <p:nvPicPr>
@@ -11511,6 +11839,10 @@
             </a:outerShdw>
           </a:effectLst>
         </p:spPr>
+        <p:txBody>
+          <a:bodyPr/>
+          <a:p/>
+        </p:txBody>
       </p:sp>
       <p:sp>
         <p:nvSpPr>
@@ -11531,6 +11863,10 @@
           </a:solidFill>
           <a:ln/>
         </p:spPr>
+        <p:txBody>
+          <a:bodyPr/>
+          <a:p/>
+        </p:txBody>
       </p:sp>
       <p:pic>
         <p:nvPicPr>
@@ -11667,6 +12003,10 @@
             </a:outerShdw>
           </a:effectLst>
         </p:spPr>
+        <p:txBody>
+          <a:bodyPr/>
+          <a:p/>
+        </p:txBody>
       </p:sp>
       <p:sp>
         <p:nvSpPr>
@@ -11687,6 +12027,10 @@
           </a:solidFill>
           <a:ln/>
         </p:spPr>
+        <p:txBody>
+          <a:bodyPr/>
+          <a:p/>
+        </p:txBody>
       </p:sp>
       <p:pic>
         <p:nvPicPr>
@@ -11823,6 +12167,10 @@
             </a:outerShdw>
           </a:effectLst>
         </p:spPr>
+        <p:txBody>
+          <a:bodyPr/>
+          <a:p/>
+        </p:txBody>
       </p:sp>
       <p:sp>
         <p:nvSpPr>
@@ -11843,6 +12191,10 @@
           </a:solidFill>
           <a:ln/>
         </p:spPr>
+        <p:txBody>
+          <a:bodyPr/>
+          <a:p/>
+        </p:txBody>
       </p:sp>
       <p:pic>
         <p:nvPicPr>
@@ -11979,6 +12331,10 @@
             </a:outerShdw>
           </a:effectLst>
         </p:spPr>
+        <p:txBody>
+          <a:bodyPr/>
+          <a:p/>
+        </p:txBody>
       </p:sp>
       <p:sp>
         <p:nvSpPr>
@@ -11999,6 +12355,10 @@
           </a:solidFill>
           <a:ln/>
         </p:spPr>
+        <p:txBody>
+          <a:bodyPr/>
+          <a:p/>
+        </p:txBody>
       </p:sp>
       <p:pic>
         <p:nvPicPr>
@@ -12316,6 +12676,10 @@
             <a:prstDash val="solid"/>
           </a:ln>
         </p:spPr>
+        <p:txBody>
+          <a:bodyPr/>
+          <a:p/>
+        </p:txBody>
       </p:sp>
       <p:sp>
         <p:nvSpPr>
@@ -12336,6 +12700,10 @@
           </a:solidFill>
           <a:ln/>
         </p:spPr>
+        <p:txBody>
+          <a:bodyPr/>
+          <a:p/>
+        </p:txBody>
       </p:sp>
       <p:pic>
         <p:nvPicPr>
@@ -12518,6 +12886,10 @@
             <a:prstDash val="solid"/>
           </a:ln>
         </p:spPr>
+        <p:txBody>
+          <a:bodyPr/>
+          <a:p/>
+        </p:txBody>
       </p:sp>
       <p:sp>
         <p:nvSpPr>
@@ -12538,6 +12910,10 @@
           </a:solidFill>
           <a:ln/>
         </p:spPr>
+        <p:txBody>
+          <a:bodyPr/>
+          <a:p/>
+        </p:txBody>
       </p:sp>
       <p:pic>
         <p:nvPicPr>
@@ -12720,6 +13096,10 @@
             <a:prstDash val="solid"/>
           </a:ln>
         </p:spPr>
+        <p:txBody>
+          <a:bodyPr/>
+          <a:p/>
+        </p:txBody>
       </p:sp>
       <p:sp>
         <p:nvSpPr>
@@ -12740,6 +13120,10 @@
           </a:solidFill>
           <a:ln/>
         </p:spPr>
+        <p:txBody>
+          <a:bodyPr/>
+          <a:p/>
+        </p:txBody>
       </p:sp>
       <p:pic>
         <p:nvPicPr>
@@ -12922,6 +13306,10 @@
             <a:prstDash val="solid"/>
           </a:ln>
         </p:spPr>
+        <p:txBody>
+          <a:bodyPr/>
+          <a:p/>
+        </p:txBody>
       </p:sp>
       <p:sp>
         <p:nvSpPr>
@@ -12942,6 +13330,10 @@
           </a:solidFill>
           <a:ln/>
         </p:spPr>
+        <p:txBody>
+          <a:bodyPr/>
+          <a:p/>
+        </p:txBody>
       </p:sp>
       <p:pic>
         <p:nvPicPr>
@@ -13053,7 +13445,7 @@
                 <a:ea typeface="Calibri" pitchFamily="34" charset="-122"/>
                 <a:cs typeface="Calibri" pitchFamily="34" charset="-120"/>
               </a:rPr>
-              <a:t>МОН, образовательные компании: $10K+</a:t>
+              <a:t>Партнёры, НКО: $10K+</a:t>
             </a:r>
             <a:endParaRPr lang="en-US" sz="1200" dirty="0"/>
           </a:p>
@@ -13369,6 +13761,10 @@
             </a:outerShdw>
           </a:effectLst>
         </p:spPr>
+        <p:txBody>
+          <a:bodyPr/>
+          <a:p/>
+        </p:txBody>
       </p:sp>
       <p:sp>
         <p:nvSpPr>
@@ -13391,6 +13787,10 @@
           </a:solidFill>
           <a:ln/>
         </p:spPr>
+        <p:txBody>
+          <a:bodyPr/>
+          <a:p/>
+        </p:txBody>
       </p:sp>
       <p:sp>
         <p:nvSpPr>
@@ -13498,6 +13898,10 @@
             </a:outerShdw>
           </a:effectLst>
         </p:spPr>
+        <p:txBody>
+          <a:bodyPr/>
+          <a:p/>
+        </p:txBody>
       </p:sp>
       <p:sp>
         <p:nvSpPr>
@@ -13520,6 +13924,10 @@
           </a:solidFill>
           <a:ln/>
         </p:spPr>
+        <p:txBody>
+          <a:bodyPr/>
+          <a:p/>
+        </p:txBody>
       </p:sp>
       <p:sp>
         <p:nvSpPr>
@@ -13627,6 +14035,10 @@
             </a:outerShdw>
           </a:effectLst>
         </p:spPr>
+        <p:txBody>
+          <a:bodyPr/>
+          <a:p/>
+        </p:txBody>
       </p:sp>
       <p:sp>
         <p:nvSpPr>
@@ -13649,6 +14061,10 @@
           </a:solidFill>
           <a:ln/>
         </p:spPr>
+        <p:txBody>
+          <a:bodyPr/>
+          <a:p/>
+        </p:txBody>
       </p:sp>
       <p:sp>
         <p:nvSpPr>
@@ -13949,6 +14365,10 @@
             </a:outerShdw>
           </a:effectLst>
         </p:spPr>
+        <p:txBody>
+          <a:bodyPr/>
+          <a:p/>
+        </p:txBody>
       </p:sp>
       <p:sp>
         <p:nvSpPr>
@@ -13969,6 +14389,10 @@
           </a:solidFill>
           <a:ln/>
         </p:spPr>
+        <p:txBody>
+          <a:bodyPr/>
+          <a:p/>
+        </p:txBody>
       </p:sp>
       <p:pic>
         <p:nvPicPr>
@@ -14144,6 +14568,10 @@
             </a:outerShdw>
           </a:effectLst>
         </p:spPr>
+        <p:txBody>
+          <a:bodyPr/>
+          <a:p/>
+        </p:txBody>
       </p:sp>
       <p:sp>
         <p:nvSpPr>
@@ -14164,6 +14592,10 @@
           </a:solidFill>
           <a:ln/>
         </p:spPr>
+        <p:txBody>
+          <a:bodyPr/>
+          <a:p/>
+        </p:txBody>
       </p:sp>
       <p:pic>
         <p:nvPicPr>
@@ -14339,6 +14771,10 @@
             </a:outerShdw>
           </a:effectLst>
         </p:spPr>
+        <p:txBody>
+          <a:bodyPr/>
+          <a:p/>
+        </p:txBody>
       </p:sp>
       <p:sp>
         <p:nvSpPr>
@@ -14359,6 +14795,10 @@
           </a:solidFill>
           <a:ln/>
         </p:spPr>
+        <p:txBody>
+          <a:bodyPr/>
+          <a:p/>
+        </p:txBody>
       </p:sp>
       <p:pic>
         <p:nvPicPr>
@@ -14534,6 +14974,10 @@
             </a:outerShdw>
           </a:effectLst>
         </p:spPr>
+        <p:txBody>
+          <a:bodyPr/>
+          <a:p/>
+        </p:txBody>
       </p:sp>
       <p:sp>
         <p:nvSpPr>
@@ -14554,6 +14998,10 @@
           </a:solidFill>
           <a:ln/>
         </p:spPr>
+        <p:txBody>
+          <a:bodyPr/>
+          <a:p/>
+        </p:txBody>
       </p:sp>
       <p:pic>
         <p:nvPicPr>
@@ -14729,6 +15177,10 @@
             </a:outerShdw>
           </a:effectLst>
         </p:spPr>
+        <p:txBody>
+          <a:bodyPr/>
+          <a:p/>
+        </p:txBody>
       </p:sp>
       <p:sp>
         <p:nvSpPr>
@@ -14749,6 +15201,10 @@
           </a:solidFill>
           <a:ln/>
         </p:spPr>
+        <p:txBody>
+          <a:bodyPr/>
+          <a:p/>
+        </p:txBody>
       </p:sp>
       <p:pic>
         <p:nvPicPr>
@@ -14924,6 +15380,10 @@
             </a:outerShdw>
           </a:effectLst>
         </p:spPr>
+        <p:txBody>
+          <a:bodyPr/>
+          <a:p/>
+        </p:txBody>
       </p:sp>
       <p:sp>
         <p:nvSpPr>
@@ -14944,6 +15404,10 @@
           </a:solidFill>
           <a:ln/>
         </p:spPr>
+        <p:txBody>
+          <a:bodyPr/>
+          <a:p/>
+        </p:txBody>
       </p:sp>
       <p:pic>
         <p:nvPicPr>
@@ -15342,6 +15806,10 @@
             <a:prstDash val="solid"/>
           </a:ln>
         </p:spPr>
+        <p:txBody>
+          <a:bodyPr/>
+          <a:p/>
+        </p:txBody>
       </p:sp>
       <p:sp>
         <p:nvSpPr>
@@ -15362,6 +15830,10 @@
           </a:solidFill>
           <a:ln/>
         </p:spPr>
+        <p:txBody>
+          <a:bodyPr/>
+          <a:p/>
+        </p:txBody>
       </p:sp>
       <p:pic>
         <p:nvPicPr>
@@ -15494,6 +15966,10 @@
             <a:prstDash val="solid"/>
           </a:ln>
         </p:spPr>
+        <p:txBody>
+          <a:bodyPr/>
+          <a:p/>
+        </p:txBody>
       </p:sp>
       <p:sp>
         <p:nvSpPr>
@@ -15514,6 +15990,10 @@
           </a:solidFill>
           <a:ln/>
         </p:spPr>
+        <p:txBody>
+          <a:bodyPr/>
+          <a:p/>
+        </p:txBody>
       </p:sp>
       <p:pic>
         <p:nvPicPr>
@@ -15646,6 +16126,10 @@
             <a:prstDash val="solid"/>
           </a:ln>
         </p:spPr>
+        <p:txBody>
+          <a:bodyPr/>
+          <a:p/>
+        </p:txBody>
       </p:sp>
       <p:sp>
         <p:nvSpPr>
@@ -15666,6 +16150,10 @@
           </a:solidFill>
           <a:ln/>
         </p:spPr>
+        <p:txBody>
+          <a:bodyPr/>
+          <a:p/>
+        </p:txBody>
       </p:sp>
       <p:pic>
         <p:nvPicPr>
@@ -15798,6 +16286,10 @@
             <a:prstDash val="solid"/>
           </a:ln>
         </p:spPr>
+        <p:txBody>
+          <a:bodyPr/>
+          <a:p/>
+        </p:txBody>
       </p:sp>
       <p:sp>
         <p:nvSpPr>
@@ -15818,6 +16310,10 @@
           </a:solidFill>
           <a:ln/>
         </p:spPr>
+        <p:txBody>
+          <a:bodyPr/>
+          <a:p/>
+        </p:txBody>
       </p:sp>
       <p:pic>
         <p:nvPicPr>
@@ -15952,6 +16448,10 @@
             </a:outerShdw>
           </a:effectLst>
         </p:spPr>
+        <p:txBody>
+          <a:bodyPr/>
+          <a:p/>
+        </p:txBody>
       </p:sp>
       <p:sp>
         <p:nvSpPr>
@@ -16525,6 +17025,10 @@
             </a:outerShdw>
           </a:effectLst>
         </p:spPr>
+        <p:txBody>
+          <a:bodyPr/>
+          <a:p/>
+        </p:txBody>
       </p:sp>
       <p:sp>
         <p:nvSpPr>
@@ -16557,6 +17061,10 @@
             </a:outerShdw>
           </a:effectLst>
         </p:spPr>
+        <p:txBody>
+          <a:bodyPr/>
+          <a:p/>
+        </p:txBody>
       </p:sp>
       <p:sp>
         <p:nvSpPr>
@@ -16697,6 +17205,10 @@
             <a:prstDash val="solid"/>
           </a:ln>
         </p:spPr>
+        <p:txBody>
+          <a:bodyPr/>
+          <a:p/>
+        </p:txBody>
       </p:sp>
       <p:sp>
         <p:nvSpPr>
@@ -16761,6 +17273,10 @@
           </a:solidFill>
           <a:ln/>
         </p:spPr>
+        <p:txBody>
+          <a:bodyPr/>
+          <a:p/>
+        </p:txBody>
       </p:sp>
       <p:sp>
         <p:nvSpPr>
@@ -16834,6 +17350,10 @@
             </a:outerShdw>
           </a:effectLst>
         </p:spPr>
+        <p:txBody>
+          <a:bodyPr/>
+          <a:p/>
+        </p:txBody>
       </p:sp>
       <p:sp>
         <p:nvSpPr>
@@ -16866,6 +17386,10 @@
             </a:outerShdw>
           </a:effectLst>
         </p:spPr>
+        <p:txBody>
+          <a:bodyPr/>
+          <a:p/>
+        </p:txBody>
       </p:sp>
       <p:sp>
         <p:nvSpPr>
@@ -17006,6 +17530,10 @@
             <a:prstDash val="solid"/>
           </a:ln>
         </p:spPr>
+        <p:txBody>
+          <a:bodyPr/>
+          <a:p/>
+        </p:txBody>
       </p:sp>
       <p:sp>
         <p:nvSpPr>
@@ -17043,7 +17571,7 @@
                 <a:ea typeface="Calibri" pitchFamily="34" charset="-122"/>
                 <a:cs typeface="Calibri" pitchFamily="34" charset="-120"/>
               </a:rPr>
-              <a:t>9 метрик, аналитика, премиум-аккаунты</a:t>
+              <a:t>8 метрик, аналитика, премиум-аккаунты</a:t>
             </a:r>
             <a:endParaRPr lang="en-US" sz="1200" dirty="0"/>
           </a:p>
@@ -17070,6 +17598,10 @@
           </a:solidFill>
           <a:ln/>
         </p:spPr>
+        <p:txBody>
+          <a:bodyPr/>
+          <a:p/>
+        </p:txBody>
       </p:sp>
       <p:sp>
         <p:nvSpPr>
@@ -17143,6 +17675,10 @@
             </a:outerShdw>
           </a:effectLst>
         </p:spPr>
+        <p:txBody>
+          <a:bodyPr/>
+          <a:p/>
+        </p:txBody>
       </p:sp>
       <p:sp>
         <p:nvSpPr>
@@ -17175,6 +17711,10 @@
             </a:outerShdw>
           </a:effectLst>
         </p:spPr>
+        <p:txBody>
+          <a:bodyPr/>
+          <a:p/>
+        </p:txBody>
       </p:sp>
       <p:sp>
         <p:nvSpPr>
@@ -17315,6 +17855,10 @@
             <a:prstDash val="solid"/>
           </a:ln>
         </p:spPr>
+        <p:txBody>
+          <a:bodyPr/>
+          <a:p/>
+        </p:txBody>
       </p:sp>
       <p:sp>
         <p:nvSpPr>
@@ -17379,6 +17923,10 @@
           </a:solidFill>
           <a:ln/>
         </p:spPr>
+        <p:txBody>
+          <a:bodyPr/>
+          <a:p/>
+        </p:txBody>
       </p:sp>
       <p:sp>
         <p:nvSpPr>
@@ -17452,6 +18000,10 @@
             </a:outerShdw>
           </a:effectLst>
         </p:spPr>
+        <p:txBody>
+          <a:bodyPr/>
+          <a:p/>
+        </p:txBody>
       </p:sp>
       <p:sp>
         <p:nvSpPr>
@@ -17484,6 +18036,10 @@
             </a:outerShdw>
           </a:effectLst>
         </p:spPr>
+        <p:txBody>
+          <a:bodyPr/>
+          <a:p/>
+        </p:txBody>
       </p:sp>
       <p:sp>
         <p:nvSpPr>
@@ -17624,6 +18180,10 @@
             <a:prstDash val="solid"/>
           </a:ln>
         </p:spPr>
+        <p:txBody>
+          <a:bodyPr/>
+          <a:p/>
+        </p:txBody>
       </p:sp>
       <p:sp>
         <p:nvSpPr>
@@ -17661,7 +18221,7 @@
                 <a:ea typeface="Calibri" pitchFamily="34" charset="-122"/>
                 <a:cs typeface="Calibri" pitchFamily="34" charset="-120"/>
               </a:rPr>
-              <a:t>API для МОН, новые города</a:t>
+              <a:t>Публичный API для партнёров, новые города</a:t>
             </a:r>
             <a:endParaRPr lang="en-US" sz="1200" dirty="0"/>
           </a:p>
@@ -17688,6 +18248,10 @@
           </a:solidFill>
           <a:ln/>
         </p:spPr>
+        <p:txBody>
+          <a:bodyPr/>
+          <a:p/>
+        </p:txBody>
       </p:sp>
       <p:sp>
         <p:nvSpPr>
@@ -17981,6 +18545,10 @@
             <a:prstDash val="solid"/>
           </a:ln>
         </p:spPr>
+        <p:txBody>
+          <a:bodyPr/>
+          <a:p/>
+        </p:txBody>
       </p:sp>
       <p:sp>
         <p:nvSpPr>
@@ -18001,6 +18569,10 @@
           </a:solidFill>
           <a:ln/>
         </p:spPr>
+        <p:txBody>
+          <a:bodyPr/>
+          <a:p/>
+        </p:txBody>
       </p:sp>
       <p:pic>
         <p:nvPicPr>
@@ -18144,6 +18716,10 @@
             <a:prstDash val="solid"/>
           </a:ln>
         </p:spPr>
+        <p:txBody>
+          <a:bodyPr/>
+          <a:p/>
+        </p:txBody>
       </p:sp>
       <p:sp>
         <p:nvSpPr>
@@ -18164,6 +18740,10 @@
           </a:solidFill>
           <a:ln/>
         </p:spPr>
+        <p:txBody>
+          <a:bodyPr/>
+          <a:p/>
+        </p:txBody>
       </p:sp>
       <p:pic>
         <p:nvPicPr>
@@ -18307,6 +18887,10 @@
             <a:prstDash val="solid"/>
           </a:ln>
         </p:spPr>
+        <p:txBody>
+          <a:bodyPr/>
+          <a:p/>
+        </p:txBody>
       </p:sp>
       <p:sp>
         <p:nvSpPr>
@@ -18327,6 +18911,10 @@
           </a:solidFill>
           <a:ln/>
         </p:spPr>
+        <p:txBody>
+          <a:bodyPr/>
+          <a:p/>
+        </p:txBody>
       </p:sp>
       <p:pic>
         <p:nvPicPr>
@@ -18470,6 +19058,10 @@
             <a:prstDash val="solid"/>
           </a:ln>
         </p:spPr>
+        <p:txBody>
+          <a:bodyPr/>
+          <a:p/>
+        </p:txBody>
       </p:sp>
       <p:sp>
         <p:nvSpPr>
@@ -18490,6 +19082,10 @@
           </a:solidFill>
           <a:ln/>
         </p:spPr>
+        <p:txBody>
+          <a:bodyPr/>
+          <a:p/>
+        </p:txBody>
       </p:sp>
       <p:pic>
         <p:nvPicPr>
@@ -18821,6 +19417,10 @@
             <a:prstDash val="solid"/>
           </a:ln>
         </p:spPr>
+        <p:txBody>
+          <a:bodyPr/>
+          <a:p/>
+        </p:txBody>
       </p:sp>
       <p:sp>
         <p:nvSpPr>
@@ -18841,6 +19441,10 @@
           </a:solidFill>
           <a:ln/>
         </p:spPr>
+        <p:txBody>
+          <a:bodyPr/>
+          <a:p/>
+        </p:txBody>
       </p:sp>
       <p:pic>
         <p:nvPicPr>
@@ -18927,6 +19531,10 @@
             <a:prstDash val="solid"/>
           </a:ln>
         </p:spPr>
+        <p:txBody>
+          <a:bodyPr/>
+          <a:p/>
+        </p:txBody>
       </p:sp>
       <p:sp>
         <p:nvSpPr>
@@ -19032,6 +19640,10 @@
             <a:prstDash val="solid"/>
           </a:ln>
         </p:spPr>
+        <p:txBody>
+          <a:bodyPr/>
+          <a:p/>
+        </p:txBody>
       </p:sp>
       <p:sp>
         <p:nvSpPr>
@@ -19052,6 +19664,10 @@
           </a:solidFill>
           <a:ln/>
         </p:spPr>
+        <p:txBody>
+          <a:bodyPr/>
+          <a:p/>
+        </p:txBody>
       </p:sp>
       <p:pic>
         <p:nvPicPr>
@@ -19138,6 +19754,10 @@
             <a:prstDash val="solid"/>
           </a:ln>
         </p:spPr>
+        <p:txBody>
+          <a:bodyPr/>
+          <a:p/>
+        </p:txBody>
       </p:sp>
       <p:sp>
         <p:nvSpPr>
@@ -19243,6 +19863,10 @@
             <a:prstDash val="solid"/>
           </a:ln>
         </p:spPr>
+        <p:txBody>
+          <a:bodyPr/>
+          <a:p/>
+        </p:txBody>
       </p:sp>
       <p:sp>
         <p:nvSpPr>
@@ -19263,6 +19887,10 @@
           </a:solidFill>
           <a:ln/>
         </p:spPr>
+        <p:txBody>
+          <a:bodyPr/>
+          <a:p/>
+        </p:txBody>
       </p:sp>
       <p:pic>
         <p:nvPicPr>
@@ -19349,6 +19977,10 @@
             <a:prstDash val="solid"/>
           </a:ln>
         </p:spPr>
+        <p:txBody>
+          <a:bodyPr/>
+          <a:p/>
+        </p:txBody>
       </p:sp>
       <p:sp>
         <p:nvSpPr>
@@ -19422,7 +20054,7 @@
                 <a:ea typeface="Calibri" pitchFamily="34" charset="-122"/>
                 <a:cs typeface="Calibri" pitchFamily="34" charset="-120"/>
               </a:rPr>
-              <a:t>Специализация + глубина данных + поддержка МОН</a:t>
+              <a:t>Специализация + глубина данных</a:t>
             </a:r>
             <a:endParaRPr lang="en-US" sz="1300" dirty="0"/>
           </a:p>
@@ -19454,6 +20086,10 @@
             <a:prstDash val="solid"/>
           </a:ln>
         </p:spPr>
+        <p:txBody>
+          <a:bodyPr/>
+          <a:p/>
+        </p:txBody>
       </p:sp>
       <p:sp>
         <p:nvSpPr>
@@ -19474,6 +20110,10 @@
           </a:solidFill>
           <a:ln/>
         </p:spPr>
+        <p:txBody>
+          <a:bodyPr/>
+          <a:p/>
+        </p:txBody>
       </p:sp>
       <p:pic>
         <p:nvPicPr>
@@ -19560,6 +20200,10 @@
             <a:prstDash val="solid"/>
           </a:ln>
         </p:spPr>
+        <p:txBody>
+          <a:bodyPr/>
+          <a:p/>
+        </p:txBody>
       </p:sp>
       <p:sp>
         <p:nvSpPr>
@@ -19665,6 +20309,10 @@
             <a:prstDash val="solid"/>
           </a:ln>
         </p:spPr>
+        <p:txBody>
+          <a:bodyPr/>
+          <a:p/>
+        </p:txBody>
       </p:sp>
       <p:sp>
         <p:nvSpPr>
@@ -19685,6 +20333,10 @@
           </a:solidFill>
           <a:ln/>
         </p:spPr>
+        <p:txBody>
+          <a:bodyPr/>
+          <a:p/>
+        </p:txBody>
       </p:sp>
       <p:pic>
         <p:nvPicPr>
@@ -19771,6 +20423,10 @@
             <a:prstDash val="solid"/>
           </a:ln>
         </p:spPr>
+        <p:txBody>
+          <a:bodyPr/>
+          <a:p/>
+        </p:txBody>
       </p:sp>
       <p:sp>
         <p:nvSpPr>
@@ -20060,6 +20716,10 @@
             <a:prstDash val="dash"/>
           </a:ln>
         </p:spPr>
+        <p:txBody>
+          <a:bodyPr/>
+          <a:p/>
+        </p:txBody>
       </p:sp>
       <p:sp>
         <p:nvSpPr>
@@ -20083,6 +20743,10 @@
             <a:prstDash val="dash"/>
           </a:ln>
         </p:spPr>
+        <p:txBody>
+          <a:bodyPr/>
+          <a:p/>
+        </p:txBody>
       </p:sp>
       <p:sp>
         <p:nvSpPr>
@@ -20106,6 +20770,10 @@
             <a:prstDash val="dash"/>
           </a:ln>
         </p:spPr>
+        <p:txBody>
+          <a:bodyPr/>
+          <a:p/>
+        </p:txBody>
       </p:sp>
       <p:sp>
         <p:nvSpPr>
@@ -20140,6 +20808,10 @@
             </a:outerShdw>
           </a:effectLst>
         </p:spPr>
+        <p:txBody>
+          <a:bodyPr/>
+          <a:p/>
+        </p:txBody>
       </p:sp>
       <p:sp>
         <p:nvSpPr>
@@ -20162,6 +20834,10 @@
           </a:solidFill>
           <a:ln/>
         </p:spPr>
+        <p:txBody>
+          <a:bodyPr/>
+          <a:p/>
+        </p:txBody>
       </p:sp>
       <p:sp>
         <p:nvSpPr>
@@ -20182,6 +20858,10 @@
           </a:solidFill>
           <a:ln/>
         </p:spPr>
+        <p:txBody>
+          <a:bodyPr/>
+          <a:p/>
+        </p:txBody>
       </p:sp>
       <p:sp>
         <p:nvSpPr>
@@ -20336,6 +21016,10 @@
             </a:outerShdw>
           </a:effectLst>
         </p:spPr>
+        <p:txBody>
+          <a:bodyPr/>
+          <a:p/>
+        </p:txBody>
       </p:sp>
       <p:sp>
         <p:nvSpPr>
@@ -20358,6 +21042,10 @@
           </a:solidFill>
           <a:ln/>
         </p:spPr>
+        <p:txBody>
+          <a:bodyPr/>
+          <a:p/>
+        </p:txBody>
       </p:sp>
       <p:sp>
         <p:nvSpPr>
@@ -20378,6 +21066,10 @@
           </a:solidFill>
           <a:ln/>
         </p:spPr>
+        <p:txBody>
+          <a:bodyPr/>
+          <a:p/>
+        </p:txBody>
       </p:sp>
       <p:sp>
         <p:nvSpPr>
@@ -20532,6 +21224,10 @@
             </a:outerShdw>
           </a:effectLst>
         </p:spPr>
+        <p:txBody>
+          <a:bodyPr/>
+          <a:p/>
+        </p:txBody>
       </p:sp>
       <p:sp>
         <p:nvSpPr>
@@ -20554,6 +21250,10 @@
           </a:solidFill>
           <a:ln/>
         </p:spPr>
+        <p:txBody>
+          <a:bodyPr/>
+          <a:p/>
+        </p:txBody>
       </p:sp>
       <p:sp>
         <p:nvSpPr>
@@ -20574,6 +21274,10 @@
           </a:solidFill>
           <a:ln/>
         </p:spPr>
+        <p:txBody>
+          <a:bodyPr/>
+          <a:p/>
+        </p:txBody>
       </p:sp>
       <p:sp>
         <p:nvSpPr>
@@ -20728,6 +21432,10 @@
             </a:outerShdw>
           </a:effectLst>
         </p:spPr>
+        <p:txBody>
+          <a:bodyPr/>
+          <a:p/>
+        </p:txBody>
       </p:sp>
       <p:sp>
         <p:nvSpPr>
@@ -20750,6 +21458,10 @@
           </a:solidFill>
           <a:ln/>
         </p:spPr>
+        <p:txBody>
+          <a:bodyPr/>
+          <a:p/>
+        </p:txBody>
       </p:sp>
       <p:sp>
         <p:nvSpPr>
@@ -20770,6 +21482,10 @@
           </a:solidFill>
           <a:ln/>
         </p:spPr>
+        <p:txBody>
+          <a:bodyPr/>
+          <a:p/>
+        </p:txBody>
       </p:sp>
       <p:sp>
         <p:nvSpPr>
@@ -21122,6 +21838,10 @@
             <a:prstDash val="solid"/>
           </a:ln>
         </p:spPr>
+        <p:txBody>
+          <a:bodyPr/>
+          <a:p/>
+        </p:txBody>
       </p:sp>
       <p:sp>
         <p:nvSpPr>
@@ -21620,6 +22340,10 @@
             </a:outerShdw>
           </a:effectLst>
         </p:spPr>
+        <p:txBody>
+          <a:bodyPr/>
+          <a:p/>
+        </p:txBody>
       </p:sp>
       <p:sp>
         <p:nvSpPr>
@@ -21640,6 +22364,10 @@
           </a:solidFill>
           <a:ln/>
         </p:spPr>
+        <p:txBody>
+          <a:bodyPr/>
+          <a:p/>
+        </p:txBody>
       </p:sp>
       <p:pic>
         <p:nvPicPr>
@@ -21776,6 +22504,10 @@
             </a:outerShdw>
           </a:effectLst>
         </p:spPr>
+        <p:txBody>
+          <a:bodyPr/>
+          <a:p/>
+        </p:txBody>
       </p:sp>
       <p:sp>
         <p:nvSpPr>
@@ -21796,6 +22528,10 @@
           </a:solidFill>
           <a:ln/>
         </p:spPr>
+        <p:txBody>
+          <a:bodyPr/>
+          <a:p/>
+        </p:txBody>
       </p:sp>
       <p:pic>
         <p:nvPicPr>
@@ -21932,6 +22668,10 @@
             </a:outerShdw>
           </a:effectLst>
         </p:spPr>
+        <p:txBody>
+          <a:bodyPr/>
+          <a:p/>
+        </p:txBody>
       </p:sp>
       <p:sp>
         <p:nvSpPr>
@@ -21952,6 +22692,10 @@
           </a:solidFill>
           <a:ln/>
         </p:spPr>
+        <p:txBody>
+          <a:bodyPr/>
+          <a:p/>
+        </p:txBody>
       </p:sp>
       <p:pic>
         <p:nvPicPr>
@@ -22010,7 +22754,7 @@
                 <a:ea typeface="Calibri" pitchFamily="34" charset="-122"/>
                 <a:cs typeface="Calibri" pitchFamily="34" charset="-120"/>
               </a:rPr>
-              <a:t>9 метрик рейтинга</a:t>
+              <a:t>8 метрик рейтинга</a:t>
             </a:r>
             <a:endParaRPr lang="en-US" sz="1500" dirty="0"/>
           </a:p>
@@ -22088,6 +22832,10 @@
             </a:outerShdw>
           </a:effectLst>
         </p:spPr>
+        <p:txBody>
+          <a:bodyPr/>
+          <a:p/>
+        </p:txBody>
       </p:sp>
       <p:sp>
         <p:nvSpPr>
@@ -22108,6 +22856,10 @@
           </a:solidFill>
           <a:ln/>
         </p:spPr>
+        <p:txBody>
+          <a:bodyPr/>
+          <a:p/>
+        </p:txBody>
       </p:sp>
       <p:pic>
         <p:nvPicPr>
@@ -22244,6 +22996,10 @@
             </a:outerShdw>
           </a:effectLst>
         </p:spPr>
+        <p:txBody>
+          <a:bodyPr/>
+          <a:p/>
+        </p:txBody>
       </p:sp>
       <p:sp>
         <p:nvSpPr>
@@ -22264,6 +23020,10 @@
           </a:solidFill>
           <a:ln/>
         </p:spPr>
+        <p:txBody>
+          <a:bodyPr/>
+          <a:p/>
+        </p:txBody>
       </p:sp>
       <p:pic>
         <p:nvPicPr>
@@ -22400,6 +23160,10 @@
             </a:outerShdw>
           </a:effectLst>
         </p:spPr>
+        <p:txBody>
+          <a:bodyPr/>
+          <a:p/>
+        </p:txBody>
       </p:sp>
       <p:sp>
         <p:nvSpPr>
@@ -22420,6 +23184,10 @@
           </a:solidFill>
           <a:ln/>
         </p:spPr>
+        <p:txBody>
+          <a:bodyPr/>
+          <a:p/>
+        </p:txBody>
       </p:sp>
       <p:pic>
         <p:nvPicPr>
@@ -22739,6 +23507,10 @@
             </a:outerShdw>
           </a:effectLst>
         </p:spPr>
+        <p:txBody>
+          <a:bodyPr/>
+          <a:p/>
+        </p:txBody>
       </p:sp>
       <p:sp>
         <p:nvSpPr>
@@ -22759,6 +23531,10 @@
           </a:solidFill>
           <a:ln/>
         </p:spPr>
+        <p:txBody>
+          <a:bodyPr/>
+          <a:p/>
+        </p:txBody>
       </p:sp>
       <p:pic>
         <p:nvPicPr>
@@ -22884,6 +23660,10 @@
             <a:prstDash val="solid"/>
           </a:ln>
         </p:spPr>
+        <p:txBody>
+          <a:bodyPr/>
+          <a:p/>
+        </p:txBody>
       </p:sp>
       <p:sp>
         <p:nvSpPr>
@@ -22975,6 +23755,10 @@
             </a:outerShdw>
           </a:effectLst>
         </p:spPr>
+        <p:txBody>
+          <a:bodyPr/>
+          <a:p/>
+        </p:txBody>
       </p:sp>
       <p:sp>
         <p:nvSpPr>
@@ -22995,6 +23779,10 @@
           </a:solidFill>
           <a:ln/>
         </p:spPr>
+        <p:txBody>
+          <a:bodyPr/>
+          <a:p/>
+        </p:txBody>
       </p:sp>
       <p:pic>
         <p:nvPicPr>
@@ -23120,6 +23908,10 @@
             <a:prstDash val="solid"/>
           </a:ln>
         </p:spPr>
+        <p:txBody>
+          <a:bodyPr/>
+          <a:p/>
+        </p:txBody>
       </p:sp>
       <p:sp>
         <p:nvSpPr>
@@ -23211,6 +24003,10 @@
             </a:outerShdw>
           </a:effectLst>
         </p:spPr>
+        <p:txBody>
+          <a:bodyPr/>
+          <a:p/>
+        </p:txBody>
       </p:sp>
       <p:sp>
         <p:nvSpPr>
@@ -23231,6 +24027,10 @@
           </a:solidFill>
           <a:ln/>
         </p:spPr>
+        <p:txBody>
+          <a:bodyPr/>
+          <a:p/>
+        </p:txBody>
       </p:sp>
       <p:pic>
         <p:nvPicPr>
@@ -23356,6 +24156,10 @@
             <a:prstDash val="solid"/>
           </a:ln>
         </p:spPr>
+        <p:txBody>
+          <a:bodyPr/>
+          <a:p/>
+        </p:txBody>
       </p:sp>
       <p:sp>
         <p:nvSpPr>
@@ -23447,6 +24251,10 @@
             </a:outerShdw>
           </a:effectLst>
         </p:spPr>
+        <p:txBody>
+          <a:bodyPr/>
+          <a:p/>
+        </p:txBody>
       </p:sp>
       <p:sp>
         <p:nvSpPr>
@@ -23467,6 +24275,10 @@
           </a:solidFill>
           <a:ln/>
         </p:spPr>
+        <p:txBody>
+          <a:bodyPr/>
+          <a:p/>
+        </p:txBody>
       </p:sp>
       <p:pic>
         <p:nvPicPr>
@@ -23592,6 +24404,10 @@
             <a:prstDash val="solid"/>
           </a:ln>
         </p:spPr>
+        <p:txBody>
+          <a:bodyPr/>
+          <a:p/>
+        </p:txBody>
       </p:sp>
       <p:sp>
         <p:nvSpPr>
@@ -23683,6 +24499,10 @@
             </a:outerShdw>
           </a:effectLst>
         </p:spPr>
+        <p:txBody>
+          <a:bodyPr/>
+          <a:p/>
+        </p:txBody>
       </p:sp>
       <p:sp>
         <p:nvSpPr>
@@ -23703,6 +24523,10 @@
           </a:solidFill>
           <a:ln/>
         </p:spPr>
+        <p:txBody>
+          <a:bodyPr/>
+          <a:p/>
+        </p:txBody>
       </p:sp>
       <p:pic>
         <p:nvPicPr>
@@ -23828,6 +24652,10 @@
             <a:prstDash val="solid"/>
           </a:ln>
         </p:spPr>
+        <p:txBody>
+          <a:bodyPr/>
+          <a:p/>
+        </p:txBody>
       </p:sp>
       <p:sp>
         <p:nvSpPr>
@@ -24146,6 +24974,10 @@
             </a:outerShdw>
           </a:effectLst>
         </p:spPr>
+        <p:txBody>
+          <a:bodyPr/>
+          <a:p/>
+        </p:txBody>
       </p:sp>
       <p:sp>
         <p:nvSpPr>
@@ -24166,6 +24998,10 @@
           </a:solidFill>
           <a:ln/>
         </p:spPr>
+        <p:txBody>
+          <a:bodyPr/>
+          <a:p/>
+        </p:txBody>
       </p:sp>
       <p:pic>
         <p:nvPicPr>
@@ -24254,6 +25090,10 @@
             <a:prstDash val="solid"/>
           </a:ln>
         </p:spPr>
+        <p:txBody>
+          <a:bodyPr/>
+          <a:p/>
+        </p:txBody>
       </p:sp>
       <p:sp>
         <p:nvSpPr>
@@ -24474,6 +25314,10 @@
           </a:solidFill>
           <a:ln/>
         </p:spPr>
+        <p:txBody>
+          <a:bodyPr/>
+          <a:p/>
+        </p:txBody>
       </p:sp>
       <p:pic>
         <p:nvPicPr>
@@ -24577,6 +25421,10 @@
           </a:solidFill>
           <a:ln/>
         </p:spPr>
+        <p:txBody>
+          <a:bodyPr/>
+          <a:p/>
+        </p:txBody>
       </p:sp>
       <p:pic>
         <p:nvPicPr>
@@ -24680,6 +25528,10 @@
           </a:solidFill>
           <a:ln/>
         </p:spPr>
+        <p:txBody>
+          <a:bodyPr/>
+          <a:p/>
+        </p:txBody>
       </p:sp>
       <p:pic>
         <p:nvPicPr>
@@ -24783,6 +25635,10 @@
           </a:solidFill>
           <a:ln/>
         </p:spPr>
+        <p:txBody>
+          <a:bodyPr/>
+          <a:p/>
+        </p:txBody>
       </p:sp>
       <p:pic>
         <p:nvPicPr>
@@ -24886,6 +25742,10 @@
           </a:solidFill>
           <a:ln/>
         </p:spPr>
+        <p:txBody>
+          <a:bodyPr/>
+          <a:p/>
+        </p:txBody>
       </p:sp>
       <p:pic>
         <p:nvPicPr>
@@ -24989,6 +25849,10 @@
           </a:solidFill>
           <a:ln/>
         </p:spPr>
+        <p:txBody>
+          <a:bodyPr/>
+          <a:p/>
+        </p:txBody>
       </p:sp>
       <p:pic>
         <p:nvPicPr>
@@ -25289,6 +26153,10 @@
             </a:outerShdw>
           </a:effectLst>
         </p:spPr>
+        <p:txBody>
+          <a:bodyPr/>
+          <a:p/>
+        </p:txBody>
       </p:sp>
       <p:sp>
         <p:nvSpPr>
@@ -25309,6 +26177,10 @@
           </a:solidFill>
           <a:ln/>
         </p:spPr>
+        <p:txBody>
+          <a:bodyPr/>
+          <a:p/>
+        </p:txBody>
       </p:sp>
       <p:pic>
         <p:nvPicPr>
@@ -25397,6 +26269,10 @@
             <a:prstDash val="solid"/>
           </a:ln>
         </p:spPr>
+        <p:txBody>
+          <a:bodyPr/>
+          <a:p/>
+        </p:txBody>
       </p:sp>
       <p:sp>
         <p:nvSpPr>
@@ -25617,6 +26493,10 @@
           </a:solidFill>
           <a:ln/>
         </p:spPr>
+        <p:txBody>
+          <a:bodyPr/>
+          <a:p/>
+        </p:txBody>
       </p:sp>
       <p:pic>
         <p:nvPicPr>
@@ -25720,6 +26600,10 @@
           </a:solidFill>
           <a:ln/>
         </p:spPr>
+        <p:txBody>
+          <a:bodyPr/>
+          <a:p/>
+        </p:txBody>
       </p:sp>
       <p:pic>
         <p:nvPicPr>
@@ -25823,6 +26707,10 @@
           </a:solidFill>
           <a:ln/>
         </p:spPr>
+        <p:txBody>
+          <a:bodyPr/>
+          <a:p/>
+        </p:txBody>
       </p:sp>
       <p:pic>
         <p:nvPicPr>
@@ -25926,6 +26814,10 @@
           </a:solidFill>
           <a:ln/>
         </p:spPr>
+        <p:txBody>
+          <a:bodyPr/>
+          <a:p/>
+        </p:txBody>
       </p:sp>
       <p:pic>
         <p:nvPicPr>
@@ -26029,6 +26921,10 @@
           </a:solidFill>
           <a:ln/>
         </p:spPr>
+        <p:txBody>
+          <a:bodyPr/>
+          <a:p/>
+        </p:txBody>
       </p:sp>
       <p:pic>
         <p:nvPicPr>
@@ -26132,6 +27028,10 @@
           </a:solidFill>
           <a:ln/>
         </p:spPr>
+        <p:txBody>
+          <a:bodyPr/>
+          <a:p/>
+        </p:txBody>
       </p:sp>
       <p:pic>
         <p:nvPicPr>
@@ -26432,6 +27332,10 @@
             </a:outerShdw>
           </a:effectLst>
         </p:spPr>
+        <p:txBody>
+          <a:bodyPr/>
+          <a:p/>
+        </p:txBody>
       </p:sp>
       <p:sp>
         <p:nvSpPr>
@@ -26452,6 +27356,10 @@
           </a:solidFill>
           <a:ln/>
         </p:spPr>
+        <p:txBody>
+          <a:bodyPr/>
+          <a:p/>
+        </p:txBody>
       </p:sp>
       <p:pic>
         <p:nvPicPr>
@@ -26540,6 +27448,10 @@
             <a:prstDash val="solid"/>
           </a:ln>
         </p:spPr>
+        <p:txBody>
+          <a:bodyPr/>
+          <a:p/>
+        </p:txBody>
       </p:sp>
       <p:sp>
         <p:nvSpPr>
@@ -26780,6 +27692,10 @@
           </a:solidFill>
           <a:ln/>
         </p:spPr>
+        <p:txBody>
+          <a:bodyPr/>
+          <a:p/>
+        </p:txBody>
       </p:sp>
       <p:pic>
         <p:nvPicPr>
@@ -26883,6 +27799,10 @@
           </a:solidFill>
           <a:ln/>
         </p:spPr>
+        <p:txBody>
+          <a:bodyPr/>
+          <a:p/>
+        </p:txBody>
       </p:sp>
       <p:pic>
         <p:nvPicPr>
@@ -26986,6 +27906,10 @@
           </a:solidFill>
           <a:ln/>
         </p:spPr>
+        <p:txBody>
+          <a:bodyPr/>
+          <a:p/>
+        </p:txBody>
       </p:sp>
       <p:pic>
         <p:nvPicPr>
@@ -27089,6 +28013,10 @@
           </a:solidFill>
           <a:ln/>
         </p:spPr>
+        <p:txBody>
+          <a:bodyPr/>
+          <a:p/>
+        </p:txBody>
       </p:sp>
       <p:pic>
         <p:nvPicPr>
@@ -27192,6 +28120,10 @@
           </a:solidFill>
           <a:ln/>
         </p:spPr>
+        <p:txBody>
+          <a:bodyPr/>
+          <a:p/>
+        </p:txBody>
       </p:sp>
       <p:pic>
         <p:nvPicPr>
@@ -27295,6 +28227,10 @@
           </a:solidFill>
           <a:ln/>
         </p:spPr>
+        <p:txBody>
+          <a:bodyPr/>
+          <a:p/>
+        </p:txBody>
       </p:sp>
       <p:pic>
         <p:nvPicPr>
@@ -27595,6 +28531,10 @@
             </a:outerShdw>
           </a:effectLst>
         </p:spPr>
+        <p:txBody>
+          <a:bodyPr/>
+          <a:p/>
+        </p:txBody>
       </p:sp>
       <p:sp>
         <p:nvSpPr>
@@ -27615,6 +28555,10 @@
           </a:solidFill>
           <a:ln/>
         </p:spPr>
+        <p:txBody>
+          <a:bodyPr/>
+          <a:p/>
+        </p:txBody>
       </p:sp>
       <p:pic>
         <p:nvPicPr>
@@ -27703,6 +28647,10 @@
             <a:prstDash val="solid"/>
           </a:ln>
         </p:spPr>
+        <p:txBody>
+          <a:bodyPr/>
+          <a:p/>
+        </p:txBody>
       </p:sp>
       <p:sp>
         <p:nvSpPr>
@@ -27923,6 +28871,10 @@
           </a:solidFill>
           <a:ln/>
         </p:spPr>
+        <p:txBody>
+          <a:bodyPr/>
+          <a:p/>
+        </p:txBody>
       </p:sp>
       <p:pic>
         <p:nvPicPr>
@@ -28026,6 +28978,10 @@
           </a:solidFill>
           <a:ln/>
         </p:spPr>
+        <p:txBody>
+          <a:bodyPr/>
+          <a:p/>
+        </p:txBody>
       </p:sp>
       <p:pic>
         <p:nvPicPr>
@@ -28129,6 +29085,10 @@
           </a:solidFill>
           <a:ln/>
         </p:spPr>
+        <p:txBody>
+          <a:bodyPr/>
+          <a:p/>
+        </p:txBody>
       </p:sp>
       <p:pic>
         <p:nvPicPr>
@@ -28232,6 +29192,10 @@
           </a:solidFill>
           <a:ln/>
         </p:spPr>
+        <p:txBody>
+          <a:bodyPr/>
+          <a:p/>
+        </p:txBody>
       </p:sp>
       <p:pic>
         <p:nvPicPr>
@@ -28335,6 +29299,10 @@
           </a:solidFill>
           <a:ln/>
         </p:spPr>
+        <p:txBody>
+          <a:bodyPr/>
+          <a:p/>
+        </p:txBody>
       </p:sp>
       <p:pic>
         <p:nvPicPr>
@@ -28438,6 +29406,10 @@
           </a:solidFill>
           <a:ln/>
         </p:spPr>
+        <p:txBody>
+          <a:bodyPr/>
+          <a:p/>
+        </p:txBody>
       </p:sp>
       <p:pic>
         <p:nvPicPr>
@@ -28738,6 +29710,10 @@
             </a:outerShdw>
           </a:effectLst>
         </p:spPr>
+        <p:txBody>
+          <a:bodyPr/>
+          <a:p/>
+        </p:txBody>
       </p:sp>
       <p:sp>
         <p:nvSpPr>
@@ -28758,6 +29734,10 @@
           </a:solidFill>
           <a:ln/>
         </p:spPr>
+        <p:txBody>
+          <a:bodyPr/>
+          <a:p/>
+        </p:txBody>
       </p:sp>
       <p:pic>
         <p:nvPicPr>
@@ -28846,6 +29826,10 @@
             <a:prstDash val="solid"/>
           </a:ln>
         </p:spPr>
+        <p:txBody>
+          <a:bodyPr/>
+          <a:p/>
+        </p:txBody>
       </p:sp>
       <p:sp>
         <p:nvSpPr>
@@ -29066,6 +30050,10 @@
           </a:solidFill>
           <a:ln/>
         </p:spPr>
+        <p:txBody>
+          <a:bodyPr/>
+          <a:p/>
+        </p:txBody>
       </p:sp>
       <p:pic>
         <p:nvPicPr>
@@ -29169,6 +30157,10 @@
           </a:solidFill>
           <a:ln/>
         </p:spPr>
+        <p:txBody>
+          <a:bodyPr/>
+          <a:p/>
+        </p:txBody>
       </p:sp>
       <p:pic>
         <p:nvPicPr>
@@ -29272,6 +30264,10 @@
           </a:solidFill>
           <a:ln/>
         </p:spPr>
+        <p:txBody>
+          <a:bodyPr/>
+          <a:p/>
+        </p:txBody>
       </p:sp>
       <p:pic>
         <p:nvPicPr>
@@ -29375,6 +30371,10 @@
           </a:solidFill>
           <a:ln/>
         </p:spPr>
+        <p:txBody>
+          <a:bodyPr/>
+          <a:p/>
+        </p:txBody>
       </p:sp>
       <p:pic>
         <p:nvPicPr>
@@ -29478,6 +30478,10 @@
           </a:solidFill>
           <a:ln/>
         </p:spPr>
+        <p:txBody>
+          <a:bodyPr/>
+          <a:p/>
+        </p:txBody>
       </p:sp>
       <p:pic>
         <p:nvPicPr>
@@ -29581,6 +30585,10 @@
           </a:solidFill>
           <a:ln/>
         </p:spPr>
+        <p:txBody>
+          <a:bodyPr/>
+          <a:p/>
+        </p:txBody>
       </p:sp>
       <p:pic>
         <p:nvPicPr>

--- a/docs/EduHub_Presentation_Full_Pro.pptx
+++ b/docs/EduHub_Presentation_Full_Pro.pptx
@@ -3661,7 +3661,7 @@
                 <a:ea typeface="Calibri" pitchFamily="34" charset="-122"/>
                 <a:cs typeface="Calibri" pitchFamily="34" charset="-120"/>
               </a:rPr>
-              <a:t>В MVP платформа связывает две стороны. Соискатели и доска вакансий — во вторую волну.</a:t>
+              <a:t>EduHub — трёхсторонний рынок с первого дня: родители, учреждения и соискатели-педагоги.</a:t>
             </a:r>
             <a:endParaRPr lang="en-US" sz="1400" dirty="0"/>
           </a:p>
@@ -5057,7 +5057,7 @@
                 <a:ea typeface="Calibri" pitchFamily="34" charset="-122"/>
                 <a:cs typeface="Calibri" pitchFamily="34" charset="-120"/>
               </a:rPr>
-              <a:t>Вакансии, рейтинг работодателей</a:t>
+              <a:t>Вакансии, отзывы о работодателе</a:t>
             </a:r>
             <a:endParaRPr lang="en-US" sz="1050" dirty="0"/>
           </a:p>
@@ -5096,7 +5096,7 @@
                 <a:ea typeface="Calibri" pitchFamily="34" charset="-122"/>
                 <a:cs typeface="Calibri" pitchFamily="34" charset="-120"/>
               </a:rPr>
-              <a:t>○</a:t>
+              <a:t>✓</a:t>
             </a:r>
             <a:endParaRPr lang="en-US" sz="1300" dirty="0"/>
           </a:p>
@@ -5174,7 +5174,7 @@
                 <a:ea typeface="Calibri" pitchFamily="34" charset="-122"/>
                 <a:cs typeface="Calibri" pitchFamily="34" charset="-120"/>
               </a:rPr>
-              <a:t>○</a:t>
+              <a:t>✓</a:t>
             </a:r>
             <a:endParaRPr lang="en-US" sz="1300" dirty="0"/>
           </a:p>
@@ -5252,7 +5252,7 @@
                 <a:ea typeface="Calibri" pitchFamily="34" charset="-122"/>
                 <a:cs typeface="Calibri" pitchFamily="34" charset="-120"/>
               </a:rPr>
-              <a:t>○</a:t>
+              <a:t>✓</a:t>
             </a:r>
             <a:endParaRPr lang="en-US" sz="1300" dirty="0"/>
           </a:p>
@@ -5330,7 +5330,7 @@
                 <a:ea typeface="Calibri" pitchFamily="34" charset="-122"/>
                 <a:cs typeface="Calibri" pitchFamily="34" charset="-120"/>
               </a:rPr>
-              <a:t>○</a:t>
+              <a:t>✓</a:t>
             </a:r>
             <a:endParaRPr lang="en-US" sz="1300" dirty="0"/>
           </a:p>
@@ -5434,7 +5434,7 @@
                 <a:ea typeface="Calibri" pitchFamily="34" charset="-122"/>
                 <a:cs typeface="Calibri" pitchFamily="34" charset="-120"/>
               </a:rPr>
-              <a:t>Вторая волна</a:t>
+              <a:t>MVP · Бесплатно</a:t>
             </a:r>
             <a:endParaRPr lang="en-US" sz="1150" dirty="0"/>
           </a:p>

--- a/docs/EduHub_Presentation_Full_Pro.pptx
+++ b/docs/EduHub_Presentation_Full_Pro.pptx
@@ -18970,7 +18970,7 @@
                   <a:srgbClr val="1B3A5C"/>
                 </a:solidFill>
               </a:rPr>
-              <a:t>Доска вакансий</a:t>
+              <a:t>CV-база соискателей</a:t>
             </a:r>
             <a:endParaRPr lang="en-US" sz="1500" dirty="0"/>
           </a:p>
@@ -19026,7 +19026,7 @@
                 <a:ea typeface="Calibri" pitchFamily="34" charset="-122"/>
                 <a:cs typeface="Calibri" pitchFamily="34" charset="-120"/>
               </a:rPr>
-              <a:t>Фактически отдельный продукт; добавляем после запуска основного</a:t>
+              <a:t>Обратный поиск учреждениями — отдельный модуль, откладываем до роста базы соискателей</a:t>
             </a:r>
             <a:endParaRPr lang="en-US" sz="1150" dirty="0"/>
           </a:p>
